--- a/interop-europe/ERA-ontology-reusability.pptx
+++ b/interop-europe/ERA-ontology-reusability.pptx
@@ -6495,7 +6495,7 @@
                           </a:solidFill>
                           <a:latin typeface="Calibri"/>
                         </a:rPr>
-                        <a:t>17 deprecated properties still carrying 237,781 statements</a:t>
+                        <a:t>17 retired properties still carrying 237,781 statements, in 9 countries</a:t>
                       </a:r>
                     </a:p>
                   </a:txBody>
@@ -6518,7 +6518,7 @@
                           </a:solidFill>
                           <a:latin typeface="Calibri"/>
                         </a:rPr>
-                        <a:t>Only 1 declares a successor; deprecation never reached the data</a:t>
+                        <a:t>Only 1 declares a successor; now excluded from the tools, but still reported</a:t>
                       </a:r>
                     </a:p>
                   </a:txBody>
